--- a/Google-AI-Builder/media/presentation/SamanvAI_AI_Builder_Cup_Submission.pptx
+++ b/Google-AI-Builder/media/presentation/SamanvAI_AI_Builder_Cup_Submission.pptx
@@ -8049,33 +8049,9 @@
           </a:p>
         </p:txBody>
       </p:sp>
-      <p:pic>
-        <p:nvPicPr>
-          <p:cNvPr id="136" name="Picture 135" descr="overview.jpg"/>
-          <p:cNvPicPr>
-            <a:picLocks noChangeAspect="1"/>
-          </p:cNvPicPr>
-          <p:nvPr/>
-        </p:nvPicPr>
-        <p:blipFill>
-          <a:blip r:embed="rId5"/>
-          <a:stretch>
-            <a:fillRect/>
-          </a:stretch>
-        </p:blipFill>
-        <p:spPr>
-          <a:xfrm>
-            <a:off x="411480" y="1417320"/>
-            <a:ext cx="2606040" cy="1463040"/>
-          </a:xfrm>
-          <a:prstGeom prst="rect">
-            <a:avLst/>
-          </a:prstGeom>
-        </p:spPr>
-      </p:pic>
-      <p:sp>
-        <p:nvSpPr>
-          <p:cNvPr id="137" name="TextBox 136"/>
+      <p:sp>
+        <p:nvSpPr>
+          <p:cNvPr id="136" name="TextBox 135"/>
           <p:cNvSpPr txBox="1"/>
           <p:nvPr/>
         </p:nvSpPr>
@@ -8112,33 +8088,9 @@
           </a:p>
         </p:txBody>
       </p:sp>
-      <p:pic>
-        <p:nvPicPr>
-          <p:cNvPr id="138" name="Picture 137" descr="map.jpg"/>
-          <p:cNvPicPr>
-            <a:picLocks noChangeAspect="1"/>
-          </p:cNvPicPr>
-          <p:nvPr/>
-        </p:nvPicPr>
-        <p:blipFill>
-          <a:blip r:embed="rId6"/>
-          <a:stretch>
-            <a:fillRect/>
-          </a:stretch>
-        </p:blipFill>
-        <p:spPr>
-          <a:xfrm>
-            <a:off x="3264408" y="1417320"/>
-            <a:ext cx="2606040" cy="1463040"/>
-          </a:xfrm>
-          <a:prstGeom prst="rect">
-            <a:avLst/>
-          </a:prstGeom>
-        </p:spPr>
-      </p:pic>
-      <p:sp>
-        <p:nvSpPr>
-          <p:cNvPr id="139" name="TextBox 138"/>
+      <p:sp>
+        <p:nvSpPr>
+          <p:cNvPr id="137" name="TextBox 136"/>
           <p:cNvSpPr txBox="1"/>
           <p:nvPr/>
         </p:nvSpPr>
@@ -8175,33 +8127,9 @@
           </a:p>
         </p:txBody>
       </p:sp>
-      <p:pic>
-        <p:nvPicPr>
-          <p:cNvPr id="140" name="Picture 139" descr="form.jpg"/>
-          <p:cNvPicPr>
-            <a:picLocks noChangeAspect="1"/>
-          </p:cNvPicPr>
-          <p:nvPr/>
-        </p:nvPicPr>
-        <p:blipFill>
-          <a:blip r:embed="rId7"/>
-          <a:stretch>
-            <a:fillRect/>
-          </a:stretch>
-        </p:blipFill>
-        <p:spPr>
-          <a:xfrm>
-            <a:off x="6117336" y="1417320"/>
-            <a:ext cx="2606040" cy="1463040"/>
-          </a:xfrm>
-          <a:prstGeom prst="rect">
-            <a:avLst/>
-          </a:prstGeom>
-        </p:spPr>
-      </p:pic>
-      <p:sp>
-        <p:nvSpPr>
-          <p:cNvPr id="141" name="TextBox 140"/>
+      <p:sp>
+        <p:nvSpPr>
+          <p:cNvPr id="138" name="TextBox 137"/>
           <p:cNvSpPr txBox="1"/>
           <p:nvPr/>
         </p:nvSpPr>
@@ -8240,7 +8168,7 @@
       </p:sp>
       <p:sp>
         <p:nvSpPr>
-          <p:cNvPr id="142" name="TextBox 141"/>
+          <p:cNvPr id="139" name="TextBox 138"/>
           <p:cNvSpPr txBox="1"/>
           <p:nvPr/>
         </p:nvSpPr>
@@ -10662,7 +10590,7 @@
                 </a:solidFill>
                 <a:latin typeface="Arial"/>
               </a:rPr>
-              <a:t>GitLab migration is planned. This workspace is not currently connected to a public Git remote.</a:t>
+              <a:t>Public GitHub repository. Repository URL is not included in this submission deck.</a:t>
             </a:r>
           </a:p>
         </p:txBody>
@@ -12174,38 +12102,9 @@
           </a:p>
         </p:txBody>
       </p:sp>
-      <p:pic>
-        <p:nvPicPr>
-          <p:cNvPr id="64" name="Picture 63" descr="citizen.jpg"/>
-          <p:cNvPicPr>
-            <a:picLocks noChangeAspect="1"/>
-          </p:cNvPicPr>
-          <p:nvPr/>
-        </p:nvPicPr>
-        <p:blipFill>
-          <a:blip r:embed="rId5"/>
-          <a:stretch>
-            <a:fillRect/>
-          </a:stretch>
-        </p:blipFill>
-        <p:spPr>
-          <a:xfrm>
-            <a:off x="502920" y="1444752"/>
-            <a:ext cx="3977639" cy="2240280"/>
-          </a:xfrm>
-          <a:prstGeom prst="rect">
-            <a:avLst/>
-          </a:prstGeom>
-          <a:ln w="12700">
-            <a:solidFill>
-              <a:srgbClr val="314147"/>
-            </a:solidFill>
-          </a:ln>
-        </p:spPr>
-      </p:pic>
-      <p:sp>
-        <p:nvSpPr>
-          <p:cNvPr id="65" name="TextBox 64"/>
+      <p:sp>
+        <p:nvSpPr>
+          <p:cNvPr id="64" name="TextBox 63"/>
           <p:cNvSpPr txBox="1"/>
           <p:nvPr/>
         </p:nvSpPr>
@@ -16474,33 +16373,9 @@
           </a:p>
         </p:txBody>
       </p:sp>
-      <p:pic>
-        <p:nvPicPr>
-          <p:cNvPr id="105" name="Picture 104" descr="citizen.jpg"/>
-          <p:cNvPicPr>
-            <a:picLocks noChangeAspect="1"/>
-          </p:cNvPicPr>
-          <p:nvPr/>
-        </p:nvPicPr>
-        <p:blipFill>
-          <a:blip r:embed="rId5"/>
-          <a:stretch>
-            <a:fillRect/>
-          </a:stretch>
-        </p:blipFill>
-        <p:spPr>
-          <a:xfrm>
-            <a:off x="411480" y="1755648"/>
-            <a:ext cx="2606040" cy="1463040"/>
-          </a:xfrm>
-          <a:prstGeom prst="rect">
-            <a:avLst/>
-          </a:prstGeom>
-        </p:spPr>
-      </p:pic>
-      <p:sp>
-        <p:nvSpPr>
-          <p:cNvPr id="106" name="TextBox 105"/>
+      <p:sp>
+        <p:nvSpPr>
+          <p:cNvPr id="105" name="TextBox 104"/>
           <p:cNvSpPr txBox="1"/>
           <p:nvPr/>
         </p:nvSpPr>
@@ -16539,7 +16414,7 @@
       </p:sp>
       <p:sp>
         <p:nvSpPr>
-          <p:cNvPr id="107" name="TextBox 106"/>
+          <p:cNvPr id="106" name="TextBox 105"/>
           <p:cNvSpPr txBox="1"/>
           <p:nvPr/>
         </p:nvSpPr>
@@ -16576,33 +16451,9 @@
           </a:p>
         </p:txBody>
       </p:sp>
-      <p:pic>
-        <p:nvPicPr>
-          <p:cNvPr id="108" name="Picture 107" descr="map.jpg"/>
-          <p:cNvPicPr>
-            <a:picLocks noChangeAspect="1"/>
-          </p:cNvPicPr>
-          <p:nvPr/>
-        </p:nvPicPr>
-        <p:blipFill>
-          <a:blip r:embed="rId6"/>
-          <a:stretch>
-            <a:fillRect/>
-          </a:stretch>
-        </p:blipFill>
-        <p:spPr>
-          <a:xfrm>
-            <a:off x="3264408" y="1755648"/>
-            <a:ext cx="2606040" cy="1463040"/>
-          </a:xfrm>
-          <a:prstGeom prst="rect">
-            <a:avLst/>
-          </a:prstGeom>
-        </p:spPr>
-      </p:pic>
-      <p:sp>
-        <p:nvSpPr>
-          <p:cNvPr id="109" name="TextBox 108"/>
+      <p:sp>
+        <p:nvSpPr>
+          <p:cNvPr id="107" name="TextBox 106"/>
           <p:cNvSpPr txBox="1"/>
           <p:nvPr/>
         </p:nvSpPr>
@@ -16641,7 +16492,7 @@
       </p:sp>
       <p:sp>
         <p:nvSpPr>
-          <p:cNvPr id="110" name="TextBox 109"/>
+          <p:cNvPr id="108" name="TextBox 107"/>
           <p:cNvSpPr txBox="1"/>
           <p:nvPr/>
         </p:nvSpPr>
@@ -16678,33 +16529,9 @@
           </a:p>
         </p:txBody>
       </p:sp>
-      <p:pic>
-        <p:nvPicPr>
-          <p:cNvPr id="111" name="Picture 110" descr="assistant.jpg"/>
-          <p:cNvPicPr>
-            <a:picLocks noChangeAspect="1"/>
-          </p:cNvPicPr>
-          <p:nvPr/>
-        </p:nvPicPr>
-        <p:blipFill>
-          <a:blip r:embed="rId7"/>
-          <a:stretch>
-            <a:fillRect/>
-          </a:stretch>
-        </p:blipFill>
-        <p:spPr>
-          <a:xfrm>
-            <a:off x="6117336" y="1755648"/>
-            <a:ext cx="2606040" cy="1463040"/>
-          </a:xfrm>
-          <a:prstGeom prst="rect">
-            <a:avLst/>
-          </a:prstGeom>
-        </p:spPr>
-      </p:pic>
-      <p:sp>
-        <p:nvSpPr>
-          <p:cNvPr id="112" name="TextBox 111"/>
+      <p:sp>
+        <p:nvSpPr>
+          <p:cNvPr id="109" name="TextBox 108"/>
           <p:cNvSpPr txBox="1"/>
           <p:nvPr/>
         </p:nvSpPr>
@@ -16743,7 +16570,7 @@
       </p:sp>
       <p:sp>
         <p:nvSpPr>
-          <p:cNvPr id="113" name="TextBox 112"/>
+          <p:cNvPr id="110" name="TextBox 109"/>
           <p:cNvSpPr txBox="1"/>
           <p:nvPr/>
         </p:nvSpPr>
@@ -16782,7 +16609,7 @@
       </p:sp>
       <p:sp>
         <p:nvSpPr>
-          <p:cNvPr id="114" name="TextBox 113"/>
+          <p:cNvPr id="111" name="TextBox 110"/>
           <p:cNvSpPr txBox="1"/>
           <p:nvPr/>
         </p:nvSpPr>
@@ -17891,7 +17718,7 @@
                 </a:solidFill>
                 <a:latin typeface="Arial"/>
               </a:rPr>
-              <a:t>GitLab CI</a:t>
+              <a:t>GitHub Actions</a:t>
             </a:r>
           </a:p>
         </p:txBody>
@@ -17930,7 +17757,7 @@
                 </a:solidFill>
                 <a:latin typeface="Arial"/>
               </a:rPr>
-              <a:t>Tests and build</a:t>
+              <a:t>Tests and deploy</a:t>
             </a:r>
           </a:p>
         </p:txBody>
@@ -18137,7 +17964,7 @@
                 </a:solidFill>
                 <a:latin typeface="Arial"/>
               </a:rPr>
-              <a:t>Cloud Build</a:t>
+              <a:t>Docker build</a:t>
             </a:r>
           </a:p>
         </p:txBody>
@@ -18176,7 +18003,7 @@
                 </a:solidFill>
                 <a:latin typeface="Arial"/>
               </a:rPr>
-              <a:t>Builds root-context image</a:t>
+              <a:t>Enables API and builds image</a:t>
             </a:r>
           </a:p>
         </p:txBody>
@@ -19278,7 +19105,7 @@
                 </a:solidFill>
                 <a:latin typeface="Arial"/>
               </a:rPr>
-              <a:t>Docker + GitLab CI + Cloud Run target</a:t>
+              <a:t>Docker + GitHub Actions + Cloud Run target</a:t>
             </a:r>
           </a:p>
         </p:txBody>
